--- a/muKV_paper_talk.pptx
+++ b/muKV_paper_talk.pptx
@@ -6346,7 +6346,7 @@
                 </a:solidFill>
                 <a:latin typeface="Arial"/>
               </a:rPr>
-              <a:t>•  μKV finishes in 33.2 minutes at a 44.2 °C peak, before the trigger. That is the cache lever.</a:t>
+              <a:t>•  μKV finishes in 33.5 minutes at a 44.2 °C peak, before the trigger. That is the cache lever.</a:t>
             </a:r>
           </a:p>
           <a:p>
@@ -8630,7 +8630,7 @@
                 </a:solidFill>
                 <a:latin typeface="Arial"/>
               </a:rPr>
-              <a:t>•  4.8 times the full cache's decode throughput on the CPU and 1.23 on the GPU, at 7% of the cells and 62% less energy, with full-cache retrieval and LongBench.</a:t>
+              <a:t>•  4.8 times the full cache's decode throughput on the CPU, at 7% of the cells and 62% less energy, and 1.23 times on the GPU, with full-cache retrieval and LongBench.</a:t>
             </a:r>
           </a:p>
           <a:p>
@@ -8649,7 +8649,7 @@
                 </a:solidFill>
                 <a:latin typeface="Arial"/>
               </a:rPr>
-              <a:t>•  Around it, a clock watchdog keeps the vendor throttle unreachable and a per-request scheduler spends the battery by its level: 15% and 43% less per request at the lower tiers.</a:t>
+              <a:t>•  Around it, a clock watchdog holds the CPU below the vendor's throttle and a per-request scheduler spends the battery by its level: 15% and 43% less per request at the lower tiers.</a:t>
             </a:r>
           </a:p>
         </p:txBody>
@@ -10509,7 +10509,7 @@
                 </a:solidFill>
                 <a:latin typeface="Arial"/>
               </a:rPr>
-              <a:t>•  SnapKV reports an 8.2 times smaller cache, H2O 5 to 10 times. On this engine they deliver 1.6 to 2.8.</a:t>
+              <a:t>•  SnapKV reports an 8.2 times smaller cache, H2O 5 to 10 times. On Llama-3.2-1B they deliver 1.6 to 2.8, and on Bonsai-8B 1.0 to 1.6.</a:t>
             </a:r>
           </a:p>
           <a:p>
@@ -11310,7 +11310,7 @@
                 </a:solidFill>
                 <a:latin typeface="Arial"/>
               </a:rPr>
-              <a:t>•  Every score-reading evictor decodes slower than not evicting at all, 0.12 to 0.30 times the full cache.</a:t>
+              <a:t>•  On Llama-3.2-1B every score-reading evictor decodes slower than not evicting at all, 0.12 to 0.20 times the full cache.</a:t>
             </a:r>
           </a:p>
           <a:p>
@@ -14229,7 +14229,7 @@
                 </a:solidFill>
                 <a:latin typeface="Arial"/>
               </a:rPr>
-              <a:t>peak DDR</a:t>
+              <a:t>peak DDR, joint coolest with TOVA</a:t>
             </a:r>
           </a:p>
         </p:txBody>
